--- a/ccw5g-slides.pptx
+++ b/ccw5g-slides.pptx
@@ -7454,7 +7454,7 @@
                 </a:solidFill>
                 <a:latin typeface="Arial"/>
               </a:rPr>
-              <a:t>No skill needed: measure Claude Code as your engineers have it today.</a:t>
+              <a:t>No skill needed: measure Claude Code as installed, with your repository's setup.</a:t>
             </a:r>
           </a:p>
         </p:txBody>
